--- a/Module_07/Slides/7.3_DAX Fundamentals.pptx
+++ b/Module_07/Slides/7.3_DAX Fundamentals.pptx
@@ -1087,7 +1087,7 @@
           <a:p>
             <a:r>
               <a:rPr lang="en-US" dirty="0"/>
-              <a:t>CLOSE THE HOOK FROM SLIDE 3 HERE. The 82 versus 79 gap was trap three.
+              <a:t>CLOSE THE HOOK FROM SLIDE 3 HERE. The 82 versus 79 gap was trap three. Reminder: that specific split is hypothetical for this dataset, since swiftroute_deliveries has only two Status values. Keep the point at the level of the general principle, not a claim about what is in this file.
 Say plainly that the most consequential errors in analytics are definitional, not technical, and that no tool and no AI assistant will catch them for you. This is also the exact failure mode of one of the four measures in the Topic 7.5 audit, so it pays forward.
 WHAT TO SAY (about four minutes):
 "Three ways a measure passes every technical check and is still wrong.
@@ -1746,7 +1746,8 @@
           <a:p>
             <a:r>
               <a:rPr lang="en-US" dirty="0"/>
-              <a:t>THE GAP between 82 and 79 is not a bug. It is a definitional difference: one measure counts cancelled deliveries in the denominator and the other does not.
+              <a:t>FACILITATOR CAVEAT, READ BEFORE TEACHING THIS SLIDE: this dialogue is a hypothetical illustration, not a demonstration you can reproduce live. The SwiftRoute Module 7 dataset has exactly two Status values, On time and Late; there is no Cancelled category in this file, so the 82 versus 79 split cannot actually be built from swiftroute_deliveries. If a trainee asks to see it, say so plainly: this file keeps Status simple on purpose, and the four-value Status column (including Cancelled and Returned) is what Module 8's dataset uses, which is exactly what the Topic 7.5 DAX audit is built on. Do not attempt to fake this discrepancy in the model.
+THE GAP between 82 and 79 is not a bug, in the general case. It is a definitional difference: one measure counts cancelled deliveries in the denominator and the other does not.
 Do not resolve it now. You are planting the idea that a measure is a DEFINITION, and that writing measures is the act of pinning down what the business actually means. This returns at the end of the topic as "trap three", and again in Topic 7.5 where an AI-written measure fails for exactly this reason.
 WHAT TO SAY (about three minutes):
 "Adaeze walks over to her analyst on a Tuesday and asks this question. Our on-time rate is eighty-two percent. Why does the regional report say seventy-nine?
@@ -2943,7 +2944,7 @@
                 <a:ea typeface="Roboto Mono" pitchFamily="34" charset="-122"/>
                 <a:cs typeface="Roboto Mono" pitchFamily="34" charset="-120"/>
               </a:rPr>
-              <a:t>COUNTROWS ( deliveries )</a:t>
+              <a:t>COUNTROWS ( swiftroute_deliveries )</a:t>
             </a:r>
             <a:endParaRPr lang="en-US" sz="1050" dirty="0"/>
           </a:p>
@@ -3694,7 +3695,7 @@
                 <a:ea typeface="Roboto Mono" pitchFamily="34" charset="-122"/>
                 <a:cs typeface="Roboto Mono" pitchFamily="34" charset="-120"/>
               </a:rPr>
-              <a:t>    deliveries[Status] = "On time"</a:t>
+              <a:t>    swiftroute_deliveries[Status] = "On time"</a:t>
             </a:r>
             <a:endParaRPr lang="en-US" sz="1150" dirty="0"/>
           </a:p>
@@ -4716,7 +4717,7 @@
                 <a:ea typeface="Roboto Mono" pitchFamily="34" charset="-122"/>
                 <a:cs typeface="Roboto Mono" pitchFamily="34" charset="-120"/>
               </a:rPr>
-              <a:t>    deliveries[Status] = "On time"</a:t>
+              <a:t>    swiftroute_deliveries[Status] = "On time"</a:t>
             </a:r>
             <a:endParaRPr lang="en-US" sz="1200" dirty="0"/>
           </a:p>
@@ -9963,7 +9964,7 @@
                 <a:ea typeface="Roboto Mono" pitchFamily="34" charset="-122"/>
                 <a:cs typeface="Roboto Mono" pitchFamily="34" charset="-120"/>
               </a:rPr>
-              <a:t>                deliveries[Status] &lt;&gt; "On time" ),</a:t>
+              <a:t>                swiftroute_deliveries[Status] &lt;&gt; "On time" ),</a:t>
             </a:r>
             <a:endParaRPr lang="en-US" sz="1100" dirty="0"/>
           </a:p>
